--- a/samples/output/full_document.pptx
+++ b/samples/output/full_document.pptx
@@ -11,8 +11,6 @@
     <p:sldId id="259" r:id="rId10"/>
     <p:sldId id="260" r:id="rId11"/>
     <p:sldId id="261" r:id="rId12"/>
-    <p:sldId id="262" r:id="rId13"/>
-    <p:sldId id="263" r:id="rId14"/>
   </p:sldIdLst>
   <p:sldSz cx="9144000" cy="6858000" type="screen4x3"/>
   <p:notesSz cx="6858000" cy="9144000"/>
@@ -7184,75 +7182,203 @@
           </a:p>
         </p:txBody>
       </p:sp>
-    </p:spTree>
-  </p:cSld>
-  <p:clrMapOvr>
-    <a:masterClrMapping/>
-  </p:clrMapOvr>
-</p:sld>
-</file>
-
-<file path=ppt/slides/slide7.xml><?xml version="1.0" encoding="utf-8"?>
-<p:sld xmlns:a="http://schemas.openxmlformats.org/drawingml/2006/main" xmlns:p="http://schemas.openxmlformats.org/presentationml/2006/main" xmlns:r="http://schemas.openxmlformats.org/officeDocument/2006/relationships">
-  <p:cSld>
-    <p:spTree>
-      <p:nvGrpSpPr>
-        <p:cNvPr id="1" name=""/>
-        <p:cNvGrpSpPr/>
-        <p:nvPr/>
-      </p:nvGrpSpPr>
-      <p:grpSpPr/>
-      <p:pic>
-        <p:nvPicPr>
-          <p:cNvPr id="2" name="Picture 1" descr="image.png"/>
-          <p:cNvPicPr>
-            <a:picLocks noChangeAspect="1"/>
-          </p:cNvPicPr>
+      <p:graphicFrame>
+        <p:nvGraphicFramePr>
+          <p:cNvPr id="4" name="Table 3"/>
+          <p:cNvGraphicFramePr>
+            <a:graphicFrameLocks noGrp="1"/>
+          </p:cNvGraphicFramePr>
           <p:nvPr/>
-        </p:nvPicPr>
-        <p:blipFill>
-          <a:blip r:embed="rId2"/>
-          <a:stretch>
-            <a:fillRect/>
-          </a:stretch>
-        </p:blipFill>
-        <p:spPr>
-          <a:xfrm>
-            <a:off x="2286000" y="457200"/>
-            <a:ext cx="4041345" cy="5486400"/>
-          </a:xfrm>
-          <a:prstGeom prst="rect">
-            <a:avLst/>
-          </a:prstGeom>
-        </p:spPr>
-      </p:pic>
-    </p:spTree>
-  </p:cSld>
-  <p:clrMapOvr>
-    <a:masterClrMapping/>
-  </p:clrMapOvr>
-</p:sld>
-</file>
-
-<file path=ppt/slides/slide8.xml><?xml version="1.0" encoding="utf-8"?>
-<p:sld xmlns:a="http://schemas.openxmlformats.org/drawingml/2006/main" xmlns:p="http://schemas.openxmlformats.org/presentationml/2006/main" xmlns:r="http://schemas.openxmlformats.org/officeDocument/2006/relationships">
-  <p:cSld>
-    <p:spTree>
-      <p:nvGrpSpPr>
-        <p:cNvPr id="1" name=""/>
-        <p:cNvGrpSpPr/>
-        <p:nvPr/>
-      </p:nvGrpSpPr>
-      <p:grpSpPr/>
-      <p:sp>
-        <p:nvSpPr>
-          <p:cNvPr id="2" name="TextBox 1"/>
+        </p:nvGraphicFramePr>
+        <p:xfrm>
+          <a:off x="457200" y="4041648"/>
+          <a:ext cx="8229600" cy="1463040"/>
+        </p:xfrm>
+        <a:graphic>
+          <a:graphicData uri="http://schemas.openxmlformats.org/drawingml/2006/table">
+            <a:tbl>
+              <a:tblPr firstRow="1" bandRow="1">
+                <a:tableStyleId>{5C22544A-7EE6-4342-B048-85BDC9FD1C3A}</a:tableStyleId>
+              </a:tblPr>
+              <a:tblGrid>
+                <a:gridCol w="4114800"/>
+                <a:gridCol w="4114800"/>
+              </a:tblGrid>
+              <a:tr h="292608">
+                <a:tc>
+                  <a:txBody>
+                    <a:bodyPr/>
+                    <a:lstStyle/>
+                    <a:p>
+                      <a:r>
+                        <a:rPr sz="1200"/>
+                        <a:t>1. 65</a:t>
+                      </a:r>
+                      <a:r>
+                        <a:rPr sz="1200" baseline="-25000"/>
+                        <a:t>10</a:t>
+                      </a:r>
+                    </a:p>
+                  </a:txBody>
+                  <a:tcPr/>
+                </a:tc>
+                <a:tc>
+                  <a:txBody>
+                    <a:bodyPr/>
+                    <a:lstStyle/>
+                    <a:p>
+                      <a:r>
+                        <a:rPr sz="1200"/>
+                        <a:t>a. 110011</a:t>
+                      </a:r>
+                      <a:r>
+                        <a:rPr sz="1200" baseline="-25000"/>
+                        <a:t>2</a:t>
+                      </a:r>
+                    </a:p>
+                  </a:txBody>
+                  <a:tcPr/>
+                </a:tc>
+              </a:tr>
+              <a:tr h="292608">
+                <a:tc>
+                  <a:txBody>
+                    <a:bodyPr/>
+                    <a:lstStyle/>
+                    <a:p>
+                      <a:r>
+                        <a:rPr sz="1200"/>
+                        <a:t>2. 51</a:t>
+                      </a:r>
+                      <a:r>
+                        <a:rPr sz="1200" baseline="-25000"/>
+                        <a:t>10</a:t>
+                      </a:r>
+                    </a:p>
+                  </a:txBody>
+                  <a:tcPr/>
+                </a:tc>
+                <a:tc>
+                  <a:txBody>
+                    <a:bodyPr/>
+                    <a:lstStyle/>
+                    <a:p>
+                      <a:r>
+                        <a:rPr sz="1200"/>
+                        <a:t>b. 33</a:t>
+                      </a:r>
+                      <a:r>
+                        <a:rPr sz="1200" baseline="-25000"/>
+                        <a:t>16</a:t>
+                      </a:r>
+                    </a:p>
+                  </a:txBody>
+                  <a:tcPr/>
+                </a:tc>
+              </a:tr>
+              <a:tr h="292608">
+                <a:tc>
+                  <a:txBody>
+                    <a:bodyPr/>
+                    <a:lstStyle/>
+                    <a:p>
+                      <a:r>
+                        <a:rPr sz="1200"/>
+                        <a:t>3. 27</a:t>
+                      </a:r>
+                      <a:r>
+                        <a:rPr sz="1200" baseline="-25000"/>
+                        <a:t>10</a:t>
+                      </a:r>
+                    </a:p>
+                  </a:txBody>
+                  <a:tcPr/>
+                </a:tc>
+                <a:tc>
+                  <a:txBody>
+                    <a:bodyPr/>
+                    <a:lstStyle/>
+                    <a:p>
+                      <a:r>
+                        <a:rPr sz="1200"/>
+                        <a:t>c. 1B</a:t>
+                      </a:r>
+                      <a:r>
+                        <a:rPr sz="1200" baseline="-25000"/>
+                        <a:t>16</a:t>
+                      </a:r>
+                    </a:p>
+                  </a:txBody>
+                  <a:tcPr/>
+                </a:tc>
+              </a:tr>
+              <a:tr h="292608">
+                <a:tc>
+                  <a:txBody>
+                    <a:bodyPr/>
+                    <a:lstStyle/>
+                    <a:p/>
+                  </a:txBody>
+                  <a:tcPr/>
+                </a:tc>
+                <a:tc>
+                  <a:txBody>
+                    <a:bodyPr/>
+                    <a:lstStyle/>
+                    <a:p>
+                      <a:r>
+                        <a:rPr sz="1200"/>
+                        <a:t>d. 33</a:t>
+                      </a:r>
+                      <a:r>
+                        <a:rPr sz="1200" baseline="-25000"/>
+                        <a:t>8</a:t>
+                      </a:r>
+                    </a:p>
+                  </a:txBody>
+                  <a:tcPr/>
+                </a:tc>
+              </a:tr>
+              <a:tr h="292608">
+                <a:tc>
+                  <a:txBody>
+                    <a:bodyPr/>
+                    <a:lstStyle/>
+                    <a:p/>
+                  </a:txBody>
+                  <a:tcPr/>
+                </a:tc>
+                <a:tc>
+                  <a:txBody>
+                    <a:bodyPr/>
+                    <a:lstStyle/>
+                    <a:p>
+                      <a:r>
+                        <a:rPr sz="1200"/>
+                        <a:t>e. 101</a:t>
+                      </a:r>
+                      <a:r>
+                        <a:rPr sz="1200" baseline="-25000"/>
+                        <a:t>8</a:t>
+                      </a:r>
+                    </a:p>
+                  </a:txBody>
+                  <a:tcPr/>
+                </a:tc>
+              </a:tr>
+            </a:tbl>
+          </a:graphicData>
+        </a:graphic>
+      </p:graphicFrame>
+      <p:sp>
+        <p:nvSpPr>
+          <p:cNvPr id="5" name="TextBox 4"/>
           <p:cNvSpPr txBox="1"/>
           <p:nvPr/>
         </p:nvSpPr>
         <p:spPr>
           <a:xfrm>
-            <a:off x="457200" y="457200"/>
+            <a:off x="457200" y="5596128"/>
             <a:ext cx="8229600" cy="310896"/>
           </a:xfrm>
           <a:prstGeom prst="rect">

--- a/samples/output/full_document.pptx
+++ b/samples/output/full_document.pptx
@@ -7182,23 +7182,52 @@
           </a:p>
         </p:txBody>
       </p:sp>
+      <p:sp>
+        <p:nvSpPr>
+          <p:cNvPr id="4" name="TextBox 3"/>
+          <p:cNvSpPr txBox="1"/>
+          <p:nvPr/>
+        </p:nvSpPr>
+        <p:spPr>
+          <a:xfrm>
+            <a:off x="457200" y="4041648"/>
+            <a:ext cx="8229600" cy="310896"/>
+          </a:xfrm>
+          <a:prstGeom prst="rect">
+            <a:avLst/>
+          </a:prstGeom>
+          <a:noFill/>
+        </p:spPr>
+        <p:txBody>
+          <a:bodyPr wrap="square">
+            <a:spAutoFit/>
+          </a:bodyPr>
+          <a:lstStyle/>
+          <a:p>
+            <a:r>
+              <a:rPr sz="1200"/>
+              <a:t>87. Uyğunluğu müəyyən edin.</a:t>
+            </a:r>
+          </a:p>
+        </p:txBody>
+      </p:sp>
       <p:graphicFrame>
         <p:nvGraphicFramePr>
-          <p:cNvPr id="4" name="Table 3"/>
+          <p:cNvPr id="5" name="Table 4"/>
           <p:cNvGraphicFramePr>
             <a:graphicFrameLocks noGrp="1"/>
           </p:cNvGraphicFramePr>
           <p:nvPr/>
         </p:nvGraphicFramePr>
         <p:xfrm>
-          <a:off x="457200" y="4041648"/>
+          <a:off x="457200" y="4352544"/>
           <a:ext cx="8229600" cy="1463040"/>
         </p:xfrm>
         <a:graphic>
           <a:graphicData uri="http://schemas.openxmlformats.org/drawingml/2006/table">
             <a:tbl>
-              <a:tblPr firstRow="1" bandRow="1">
-                <a:tableStyleId>{5C22544A-7EE6-4342-B048-85BDC9FD1C3A}</a:tableStyleId>
+              <a:tblPr firstRow="0" bandRow="0">
+                <a:tableStyleId>{2D5ABB26-0587-4C30-8999-92F81FD0307C}</a:tableStyleId>
               </a:tblPr>
               <a:tblGrid>
                 <a:gridCol w="4114800"/>
@@ -7220,7 +7249,20 @@
                       </a:r>
                     </a:p>
                   </a:txBody>
-                  <a:tcPr/>
+                  <a:tcPr>
+                    <a:lnL w="0">
+                      <a:noFill/>
+                    </a:lnL>
+                    <a:lnR w="0">
+                      <a:noFill/>
+                    </a:lnR>
+                    <a:lnT w="0">
+                      <a:noFill/>
+                    </a:lnT>
+                    <a:lnB w="0">
+                      <a:noFill/>
+                    </a:lnB>
+                  </a:tcPr>
                 </a:tc>
                 <a:tc>
                   <a:txBody>
@@ -7237,7 +7279,20 @@
                       </a:r>
                     </a:p>
                   </a:txBody>
-                  <a:tcPr/>
+                  <a:tcPr>
+                    <a:lnL w="0">
+                      <a:noFill/>
+                    </a:lnL>
+                    <a:lnR w="0">
+                      <a:noFill/>
+                    </a:lnR>
+                    <a:lnT w="0">
+                      <a:noFill/>
+                    </a:lnT>
+                    <a:lnB w="0">
+                      <a:noFill/>
+                    </a:lnB>
+                  </a:tcPr>
                 </a:tc>
               </a:tr>
               <a:tr h="292608">
@@ -7256,7 +7311,20 @@
                       </a:r>
                     </a:p>
                   </a:txBody>
-                  <a:tcPr/>
+                  <a:tcPr>
+                    <a:lnL w="0">
+                      <a:noFill/>
+                    </a:lnL>
+                    <a:lnR w="0">
+                      <a:noFill/>
+                    </a:lnR>
+                    <a:lnT w="0">
+                      <a:noFill/>
+                    </a:lnT>
+                    <a:lnB w="0">
+                      <a:noFill/>
+                    </a:lnB>
+                  </a:tcPr>
                 </a:tc>
                 <a:tc>
                   <a:txBody>
@@ -7273,7 +7341,20 @@
                       </a:r>
                     </a:p>
                   </a:txBody>
-                  <a:tcPr/>
+                  <a:tcPr>
+                    <a:lnL w="0">
+                      <a:noFill/>
+                    </a:lnL>
+                    <a:lnR w="0">
+                      <a:noFill/>
+                    </a:lnR>
+                    <a:lnT w="0">
+                      <a:noFill/>
+                    </a:lnT>
+                    <a:lnB w="0">
+                      <a:noFill/>
+                    </a:lnB>
+                  </a:tcPr>
                 </a:tc>
               </a:tr>
               <a:tr h="292608">
@@ -7292,7 +7373,20 @@
                       </a:r>
                     </a:p>
                   </a:txBody>
-                  <a:tcPr/>
+                  <a:tcPr>
+                    <a:lnL w="0">
+                      <a:noFill/>
+                    </a:lnL>
+                    <a:lnR w="0">
+                      <a:noFill/>
+                    </a:lnR>
+                    <a:lnT w="0">
+                      <a:noFill/>
+                    </a:lnT>
+                    <a:lnB w="0">
+                      <a:noFill/>
+                    </a:lnB>
+                  </a:tcPr>
                 </a:tc>
                 <a:tc>
                   <a:txBody>
@@ -7309,7 +7403,20 @@
                       </a:r>
                     </a:p>
                   </a:txBody>
-                  <a:tcPr/>
+                  <a:tcPr>
+                    <a:lnL w="0">
+                      <a:noFill/>
+                    </a:lnL>
+                    <a:lnR w="0">
+                      <a:noFill/>
+                    </a:lnR>
+                    <a:lnT w="0">
+                      <a:noFill/>
+                    </a:lnT>
+                    <a:lnB w="0">
+                      <a:noFill/>
+                    </a:lnB>
+                  </a:tcPr>
                 </a:tc>
               </a:tr>
               <a:tr h="292608">
@@ -7319,7 +7426,20 @@
                     <a:lstStyle/>
                     <a:p/>
                   </a:txBody>
-                  <a:tcPr/>
+                  <a:tcPr>
+                    <a:lnL w="0">
+                      <a:noFill/>
+                    </a:lnL>
+                    <a:lnR w="0">
+                      <a:noFill/>
+                    </a:lnR>
+                    <a:lnT w="0">
+                      <a:noFill/>
+                    </a:lnT>
+                    <a:lnB w="0">
+                      <a:noFill/>
+                    </a:lnB>
+                  </a:tcPr>
                 </a:tc>
                 <a:tc>
                   <a:txBody>
@@ -7336,7 +7456,20 @@
                       </a:r>
                     </a:p>
                   </a:txBody>
-                  <a:tcPr/>
+                  <a:tcPr>
+                    <a:lnL w="0">
+                      <a:noFill/>
+                    </a:lnL>
+                    <a:lnR w="0">
+                      <a:noFill/>
+                    </a:lnR>
+                    <a:lnT w="0">
+                      <a:noFill/>
+                    </a:lnT>
+                    <a:lnB w="0">
+                      <a:noFill/>
+                    </a:lnB>
+                  </a:tcPr>
                 </a:tc>
               </a:tr>
               <a:tr h="292608">
@@ -7346,7 +7479,20 @@
                     <a:lstStyle/>
                     <a:p/>
                   </a:txBody>
-                  <a:tcPr/>
+                  <a:tcPr>
+                    <a:lnL w="0">
+                      <a:noFill/>
+                    </a:lnL>
+                    <a:lnR w="0">
+                      <a:noFill/>
+                    </a:lnR>
+                    <a:lnT w="0">
+                      <a:noFill/>
+                    </a:lnT>
+                    <a:lnB w="0">
+                      <a:noFill/>
+                    </a:lnB>
+                  </a:tcPr>
                 </a:tc>
                 <a:tc>
                   <a:txBody>
@@ -7363,7 +7509,20 @@
                       </a:r>
                     </a:p>
                   </a:txBody>
-                  <a:tcPr/>
+                  <a:tcPr>
+                    <a:lnL w="0">
+                      <a:noFill/>
+                    </a:lnL>
+                    <a:lnR w="0">
+                      <a:noFill/>
+                    </a:lnR>
+                    <a:lnT w="0">
+                      <a:noFill/>
+                    </a:lnT>
+                    <a:lnB w="0">
+                      <a:noFill/>
+                    </a:lnB>
+                  </a:tcPr>
                 </a:tc>
               </a:tr>
             </a:tbl>
@@ -7372,13 +7531,13 @@
       </p:graphicFrame>
       <p:sp>
         <p:nvSpPr>
-          <p:cNvPr id="5" name="TextBox 4"/>
+          <p:cNvPr id="6" name="TextBox 5"/>
           <p:cNvSpPr txBox="1"/>
           <p:nvPr/>
         </p:nvSpPr>
         <p:spPr>
           <a:xfrm>
-            <a:off x="457200" y="5596128"/>
+            <a:off x="457200" y="5907024"/>
             <a:ext cx="8229600" cy="310896"/>
           </a:xfrm>
           <a:prstGeom prst="rect">
